--- a/01 Classes/Aula 11 - Aplicação Cloud Indústria 40 Python Integração Cloud Big Data Parte 2.pptx
+++ b/01 Classes/Aula 11 - Aplicação Cloud Indústria 40 Python Integração Cloud Big Data Parte 2.pptx
@@ -5027,7 +5027,7 @@
                 <a:latin typeface="Times New Roman" panose="02020603050405020304" pitchFamily="18" charset="0"/>
                 <a:cs typeface="Times New Roman" panose="02020603050405020304" pitchFamily="18" charset="0"/>
               </a:rPr>
-              <a:t>=</a:t>
+              <a:t>='</a:t>
             </a:r>
             <a:r>
               <a:rPr lang="pt-BR" sz="2000" dirty="0" err="1">
@@ -5335,7 +5335,7 @@
                 <a:latin typeface="Times New Roman" panose="02020603050405020304" pitchFamily="18" charset="0"/>
                 <a:cs typeface="Times New Roman" panose="02020603050405020304" pitchFamily="18" charset="0"/>
               </a:rPr>
-              <a:t>y = entidade[</a:t>
+              <a:t>y = entidade['</a:t>
             </a:r>
             <a:r>
               <a:rPr lang="pt-BR" sz="2000" dirty="0" err="1">
@@ -5467,7 +5467,7 @@
                 <a:latin typeface="Times New Roman" panose="02020603050405020304" pitchFamily="18" charset="0"/>
                 <a:cs typeface="Times New Roman" panose="02020603050405020304" pitchFamily="18" charset="0"/>
               </a:rPr>
-              <a:t>(</a:t>
+              <a:t>('</a:t>
             </a:r>
             <a:r>
               <a:rPr lang="pt-BR" sz="2000" dirty="0" err="1">
@@ -10305,6 +10305,13 @@
               <a:buNone/>
             </a:pPr>
             <a:r>
+              <a:rPr lang="pt-BR" sz="2000" b="1" dirty="0">
+                <a:latin typeface="Times New Roman" panose="02020603050405020304" pitchFamily="18" charset="0"/>
+                <a:cs typeface="Times New Roman" panose="02020603050405020304" pitchFamily="18" charset="0"/>
+              </a:rPr>
+              <a:t>	</a:t>
+            </a:r>
+            <a:r>
               <a:rPr lang="pt-BR" sz="2000" b="1" dirty="0" err="1">
                 <a:latin typeface="Times New Roman" panose="02020603050405020304" pitchFamily="18" charset="0"/>
                 <a:cs typeface="Times New Roman" panose="02020603050405020304" pitchFamily="18" charset="0"/>
@@ -10402,7 +10409,7 @@
                 <a:latin typeface="Times New Roman" panose="02020603050405020304" pitchFamily="18" charset="0"/>
                 <a:cs typeface="Times New Roman" panose="02020603050405020304" pitchFamily="18" charset="0"/>
               </a:rPr>
-              <a:t>O </a:t>
+              <a:t>	O </a:t>
             </a:r>
             <a:r>
               <a:rPr lang="pt-BR" sz="2000" b="1" dirty="0" err="1">
@@ -10419,25 +10426,11 @@
               <a:t> é um dos principais pacotes da linguagem Python para </a:t>
             </a:r>
             <a:r>
-              <a:rPr lang="pt-BR" sz="2000" b="1" dirty="0" err="1">
-                <a:latin typeface="Times New Roman" panose="02020603050405020304" pitchFamily="18" charset="0"/>
-                <a:cs typeface="Times New Roman" panose="02020603050405020304" pitchFamily="18" charset="0"/>
-              </a:rPr>
-              <a:t>machine</a:t>
-            </a:r>
-            <a:r>
               <a:rPr lang="pt-BR" sz="2000" b="1" dirty="0">
                 <a:latin typeface="Times New Roman" panose="02020603050405020304" pitchFamily="18" charset="0"/>
                 <a:cs typeface="Times New Roman" panose="02020603050405020304" pitchFamily="18" charset="0"/>
               </a:rPr>
-              <a:t> </a:t>
-            </a:r>
-            <a:r>
-              <a:rPr lang="pt-BR" sz="2000" b="1" dirty="0" err="1">
-                <a:latin typeface="Times New Roman" panose="02020603050405020304" pitchFamily="18" charset="0"/>
-                <a:cs typeface="Times New Roman" panose="02020603050405020304" pitchFamily="18" charset="0"/>
-              </a:rPr>
-              <a:t>learning</a:t>
+              <a:t>machine learning</a:t>
             </a:r>
             <a:r>
               <a:rPr lang="pt-BR" sz="2000" dirty="0">
@@ -11123,7 +11116,7 @@
                 <a:latin typeface="Times New Roman" panose="02020603050405020304" pitchFamily="18" charset="0"/>
                 <a:cs typeface="Times New Roman" panose="02020603050405020304" pitchFamily="18" charset="0"/>
               </a:rPr>
-              <a:t>Realizar análises de dados utilizando o </a:t>
+              <a:t>	Realizar análises de dados utilizando o </a:t>
             </a:r>
             <a:r>
               <a:rPr lang="pt-BR" sz="2000" b="1" dirty="0">
@@ -11137,7 +11130,24 @@
                 <a:latin typeface="Times New Roman" panose="02020603050405020304" pitchFamily="18" charset="0"/>
                 <a:cs typeface="Times New Roman" panose="02020603050405020304" pitchFamily="18" charset="0"/>
               </a:rPr>
-              <a:t>, extraindo insights que auxiliam nas tomada de decisões dentro das organizações.</a:t>
+              <a:t>, extraindo </a:t>
+            </a:r>
+            <a:r>
+              <a:rPr lang="pt-BR" sz="2000" b="1" dirty="0">
+                <a:solidFill>
+                  <a:srgbClr val="FF0000"/>
+                </a:solidFill>
+                <a:latin typeface="Times New Roman" panose="02020603050405020304" pitchFamily="18" charset="0"/>
+                <a:cs typeface="Times New Roman" panose="02020603050405020304" pitchFamily="18" charset="0"/>
+              </a:rPr>
+              <a:t>insights</a:t>
+            </a:r>
+            <a:r>
+              <a:rPr lang="pt-BR" sz="2000" dirty="0">
+                <a:latin typeface="Times New Roman" panose="02020603050405020304" pitchFamily="18" charset="0"/>
+                <a:cs typeface="Times New Roman" panose="02020603050405020304" pitchFamily="18" charset="0"/>
+              </a:rPr>
+              <a:t> que auxiliam nas tomada de decisões dentro das organizações.</a:t>
             </a:r>
           </a:p>
           <a:p>
@@ -11150,18 +11160,35 @@
             </a:endParaRPr>
           </a:p>
           <a:p>
-            <a:pPr marL="0" indent="0" algn="just">
-              <a:buNone/>
-            </a:pPr>
-            <a:r>
-              <a:rPr lang="pt-BR" sz="2000" dirty="0">
-                <a:latin typeface="Times New Roman" panose="02020603050405020304" pitchFamily="18" charset="0"/>
-                <a:cs typeface="Times New Roman" panose="02020603050405020304" pitchFamily="18" charset="0"/>
-              </a:rPr>
-              <a:t>Bibliotecas (</a:t>
+            <a:pPr marL="0" indent="0">
+              <a:buNone/>
+            </a:pPr>
+            <a:r>
+              <a:rPr lang="pt-BR" sz="2000" dirty="0">
+                <a:latin typeface="Times New Roman" panose="02020603050405020304" pitchFamily="18" charset="0"/>
+                <a:cs typeface="Times New Roman" panose="02020603050405020304" pitchFamily="18" charset="0"/>
+              </a:rPr>
+              <a:t>	</a:t>
+            </a:r>
+            <a:r>
+              <a:rPr lang="pt-BR" sz="2000" dirty="0" err="1">
+                <a:latin typeface="Times New Roman" panose="02020603050405020304" pitchFamily="18" charset="0"/>
+                <a:cs typeface="Times New Roman" panose="02020603050405020304" pitchFamily="18" charset="0"/>
+              </a:rPr>
+              <a:t>Bib</a:t>
+            </a:r>
+            <a:r>
+              <a:rPr lang="pt-BR" sz="2000" dirty="0">
+                <a:latin typeface="Times New Roman" panose="02020603050405020304" pitchFamily="18" charset="0"/>
+                <a:cs typeface="Times New Roman" panose="02020603050405020304" pitchFamily="18" charset="0"/>
+              </a:rPr>
+              <a:t>. (</a:t>
             </a:r>
             <a:r>
               <a:rPr lang="pt-BR" sz="2000" b="1" dirty="0" err="1">
+                <a:solidFill>
+                  <a:srgbClr val="FF0000"/>
+                </a:solidFill>
                 <a:latin typeface="Times New Roman" panose="02020603050405020304" pitchFamily="18" charset="0"/>
                 <a:cs typeface="Times New Roman" panose="02020603050405020304" pitchFamily="18" charset="0"/>
               </a:rPr>
@@ -11172,21 +11199,7 @@
                 <a:latin typeface="Times New Roman" panose="02020603050405020304" pitchFamily="18" charset="0"/>
                 <a:cs typeface="Times New Roman" panose="02020603050405020304" pitchFamily="18" charset="0"/>
               </a:rPr>
-              <a:t>): Google </a:t>
-            </a:r>
-            <a:r>
-              <a:rPr lang="pt-BR" sz="2000" dirty="0" err="1">
-                <a:latin typeface="Times New Roman" panose="02020603050405020304" pitchFamily="18" charset="0"/>
-                <a:cs typeface="Times New Roman" panose="02020603050405020304" pitchFamily="18" charset="0"/>
-              </a:rPr>
-              <a:t>Colab</a:t>
-            </a:r>
-            <a:r>
-              <a:rPr lang="pt-BR" sz="2000" dirty="0">
-                <a:latin typeface="Times New Roman" panose="02020603050405020304" pitchFamily="18" charset="0"/>
-                <a:cs typeface="Times New Roman" panose="02020603050405020304" pitchFamily="18" charset="0"/>
-              </a:rPr>
-              <a:t> (</a:t>
+              <a:t>): Google Colab (</a:t>
             </a:r>
             <a:r>
               <a:rPr lang="pt-BR" sz="2000" b="1" dirty="0" err="1">
@@ -11525,21 +11538,22 @@
             <a:pPr marL="0" indent="0" algn="just">
               <a:buNone/>
             </a:pPr>
-            <a:endParaRPr lang="pt-BR" sz="2000" dirty="0">
-              <a:latin typeface="Times New Roman" panose="02020603050405020304" pitchFamily="18" charset="0"/>
-              <a:cs typeface="Times New Roman" panose="02020603050405020304" pitchFamily="18" charset="0"/>
-            </a:endParaRPr>
-          </a:p>
-          <a:p>
-            <a:pPr marL="0" indent="0" algn="just">
-              <a:buNone/>
-            </a:pPr>
-            <a:r>
-              <a:rPr lang="pt-BR" sz="2000" dirty="0">
-                <a:latin typeface="Times New Roman" panose="02020603050405020304" pitchFamily="18" charset="0"/>
-                <a:cs typeface="Times New Roman" panose="02020603050405020304" pitchFamily="18" charset="0"/>
-              </a:rPr>
-              <a:t>Para usar o </a:t>
+            <a:r>
+              <a:rPr lang="pt-BR" sz="2000" b="1" dirty="0">
+                <a:solidFill>
+                  <a:srgbClr val="FF0000"/>
+                </a:solidFill>
+                <a:latin typeface="Times New Roman" panose="02020603050405020304" pitchFamily="18" charset="0"/>
+                <a:cs typeface="Times New Roman" panose="02020603050405020304" pitchFamily="18" charset="0"/>
+              </a:rPr>
+              <a:t>Nota</a:t>
+            </a:r>
+            <a:r>
+              <a:rPr lang="pt-BR" sz="2000" dirty="0">
+                <a:latin typeface="Times New Roman" panose="02020603050405020304" pitchFamily="18" charset="0"/>
+                <a:cs typeface="Times New Roman" panose="02020603050405020304" pitchFamily="18" charset="0"/>
+              </a:rPr>
+              <a:t>: Para usar o </a:t>
             </a:r>
             <a:r>
               <a:rPr lang="pt-BR" sz="2000" b="1" dirty="0" err="1">
@@ -11748,7 +11762,10 @@
               <a:buChar char="§"/>
             </a:pPr>
             <a:r>
-              <a:rPr lang="pt-BR" sz="2000" dirty="0">
+              <a:rPr lang="pt-BR" sz="2000" b="1" dirty="0">
+                <a:solidFill>
+                  <a:srgbClr val="002060"/>
+                </a:solidFill>
                 <a:latin typeface="Times New Roman" panose="02020603050405020304" pitchFamily="18" charset="0"/>
                 <a:cs typeface="Times New Roman" panose="02020603050405020304" pitchFamily="18" charset="0"/>
               </a:rPr>
@@ -12267,7 +12284,7 @@
                 <a:latin typeface="Times New Roman" panose="02020603050405020304" pitchFamily="18" charset="0"/>
                 <a:cs typeface="Times New Roman" panose="02020603050405020304" pitchFamily="18" charset="0"/>
               </a:rPr>
-              <a:t>='; ‘) # </a:t>
+              <a:t>=';') # </a:t>
             </a:r>
             <a:r>
               <a:rPr lang="pt-BR" sz="2000" b="1" dirty="0" err="1">
@@ -12284,7 +12301,7 @@
                 <a:latin typeface="Times New Roman" panose="02020603050405020304" pitchFamily="18" charset="0"/>
                 <a:cs typeface="Times New Roman" panose="02020603050405020304" pitchFamily="18" charset="0"/>
               </a:rPr>
-              <a:t>='encode’</a:t>
+              <a:t>='encode'</a:t>
             </a:r>
           </a:p>
           <a:p>
@@ -12592,7 +12609,41 @@
                 <a:latin typeface="Times New Roman" panose="02020603050405020304" pitchFamily="18" charset="0"/>
                 <a:cs typeface="Times New Roman" panose="02020603050405020304" pitchFamily="18" charset="0"/>
               </a:rPr>
-              <a:t>(); </a:t>
+              <a:t>(); # 5 linhas; </a:t>
+            </a:r>
+            <a:r>
+              <a:rPr lang="pt-BR" sz="2000" b="1" dirty="0" err="1">
+                <a:solidFill>
+                  <a:srgbClr val="FF0000"/>
+                </a:solidFill>
+                <a:latin typeface="Times New Roman" panose="02020603050405020304" pitchFamily="18" charset="0"/>
+                <a:cs typeface="Times New Roman" panose="02020603050405020304" pitchFamily="18" charset="0"/>
+              </a:rPr>
+              <a:t>head</a:t>
+            </a:r>
+            <a:r>
+              <a:rPr lang="pt-BR" sz="2000" dirty="0">
+                <a:latin typeface="Times New Roman" panose="02020603050405020304" pitchFamily="18" charset="0"/>
+                <a:cs typeface="Times New Roman" panose="02020603050405020304" pitchFamily="18" charset="0"/>
+              </a:rPr>
+              <a:t> = início; </a:t>
+            </a:r>
+            <a:r>
+              <a:rPr lang="pt-BR" sz="2000" b="1" dirty="0" err="1">
+                <a:solidFill>
+                  <a:srgbClr val="FF0000"/>
+                </a:solidFill>
+                <a:latin typeface="Times New Roman" panose="02020603050405020304" pitchFamily="18" charset="0"/>
+                <a:cs typeface="Times New Roman" panose="02020603050405020304" pitchFamily="18" charset="0"/>
+              </a:rPr>
+              <a:t>tail</a:t>
+            </a:r>
+            <a:r>
+              <a:rPr lang="pt-BR" sz="2000" dirty="0">
+                <a:latin typeface="Times New Roman" panose="02020603050405020304" pitchFamily="18" charset="0"/>
+                <a:cs typeface="Times New Roman" panose="02020603050405020304" pitchFamily="18" charset="0"/>
+              </a:rPr>
+              <a:t> = fim</a:t>
             </a:r>
           </a:p>
           <a:p>
@@ -12701,11 +12752,21 @@
               <a:t>[atributo].</a:t>
             </a:r>
             <a:r>
-              <a:rPr lang="pt-BR" sz="2000" dirty="0">
-                <a:latin typeface="Times New Roman" panose="02020603050405020304" pitchFamily="18" charset="0"/>
-                <a:cs typeface="Times New Roman" panose="02020603050405020304" pitchFamily="18" charset="0"/>
-              </a:rPr>
-              <a:t>método -&gt; ex.: entidade</a:t>
+              <a:rPr lang="pt-BR" sz="2000" b="1" dirty="0">
+                <a:solidFill>
+                  <a:srgbClr val="FF0000"/>
+                </a:solidFill>
+                <a:latin typeface="Times New Roman" panose="02020603050405020304" pitchFamily="18" charset="0"/>
+                <a:cs typeface="Times New Roman" panose="02020603050405020304" pitchFamily="18" charset="0"/>
+              </a:rPr>
+              <a:t>método</a:t>
+            </a:r>
+            <a:r>
+              <a:rPr lang="pt-BR" sz="2000" dirty="0">
+                <a:latin typeface="Times New Roman" panose="02020603050405020304" pitchFamily="18" charset="0"/>
+                <a:cs typeface="Times New Roman" panose="02020603050405020304" pitchFamily="18" charset="0"/>
+              </a:rPr>
+              <a:t> -&gt; ex.: entidade</a:t>
             </a:r>
             <a:r>
               <a:rPr lang="pt-BR" sz="2000" b="1" dirty="0">
@@ -13138,7 +13199,7 @@
                 <a:latin typeface="Times New Roman" panose="02020603050405020304" pitchFamily="18" charset="0"/>
                 <a:cs typeface="Times New Roman" panose="02020603050405020304" pitchFamily="18" charset="0"/>
               </a:rPr>
-              <a:t>()[[</a:t>
+              <a:t>()[['</a:t>
             </a:r>
             <a:r>
               <a:rPr lang="pt-BR" sz="2000" dirty="0" err="1">
@@ -13178,7 +13239,7 @@
                 <a:latin typeface="Times New Roman" panose="02020603050405020304" pitchFamily="18" charset="0"/>
                 <a:cs typeface="Times New Roman" panose="02020603050405020304" pitchFamily="18" charset="0"/>
               </a:rPr>
-              <a:t>(correlacao2[[</a:t>
+              <a:t>(correlacao2[['</a:t>
             </a:r>
             <a:r>
               <a:rPr lang="pt-BR" sz="2000" dirty="0" err="1">
